--- a/TAZA/_документы/Структура ЦАКФ и проектного офиса ТК – от Айгерим 20.10 – без окладов.pptx
+++ b/TAZA/_документы/Структура ЦАКФ и проектного офиса ТК – от Айгерим 20.10 – без окладов.pptx
@@ -4592,7 +4592,24 @@
                 </a:solidFill>
                 <a:latin typeface="Segoe UI" panose="020B0502040204020203" pitchFamily="34" charset="0"/>
               </a:rPr>
-              <a:t>Национальный координатор</a:t>
+              <a:t>Руководитель проектного офиса</a:t>
+            </a:r>
+            <a:br>
+              <a:rPr lang="ru-RU" sz="1000" b="1" dirty="0">
+                <a:solidFill>
+                  <a:srgbClr val="FFFFFF"/>
+                </a:solidFill>
+                <a:latin typeface="Segoe UI" panose="020B0502040204020203" pitchFamily="34" charset="0"/>
+              </a:rPr>
+            </a:br>
+            <a:r>
+              <a:rPr lang="ru-RU" sz="1000" b="1" dirty="0">
+                <a:solidFill>
+                  <a:srgbClr val="FFFFFF"/>
+                </a:solidFill>
+                <a:latin typeface="Segoe UI" panose="020B0502040204020203" pitchFamily="34" charset="0"/>
+              </a:rPr>
+              <a:t>«Таза Қазақстан»</a:t>
             </a:r>
             <a:endParaRPr lang="ru-RU" sz="1000" b="1" dirty="0">
               <a:solidFill>

--- a/TAZA/_документы/Структура ЦАКФ и проектного офиса ТК – от Айгерим 20.10 – без окладов.pptx
+++ b/TAZA/_документы/Структура ЦАКФ и проектного офиса ТК – от Айгерим 20.10 – без окладов.pptx
@@ -4592,24 +4592,7 @@
                 </a:solidFill>
                 <a:latin typeface="Segoe UI" panose="020B0502040204020203" pitchFamily="34" charset="0"/>
               </a:rPr>
-              <a:t>Руководитель проектного офиса</a:t>
-            </a:r>
-            <a:br>
-              <a:rPr lang="ru-RU" sz="1000" b="1" dirty="0">
-                <a:solidFill>
-                  <a:srgbClr val="FFFFFF"/>
-                </a:solidFill>
-                <a:latin typeface="Segoe UI" panose="020B0502040204020203" pitchFamily="34" charset="0"/>
-              </a:rPr>
-            </a:br>
-            <a:r>
-              <a:rPr lang="ru-RU" sz="1000" b="1" dirty="0">
-                <a:solidFill>
-                  <a:srgbClr val="FFFFFF"/>
-                </a:solidFill>
-                <a:latin typeface="Segoe UI" panose="020B0502040204020203" pitchFamily="34" charset="0"/>
-              </a:rPr>
-              <a:t>«Таза Қазақстан»</a:t>
+              <a:t>Проектный офис «Таза Қазақстан»</a:t>
             </a:r>
             <a:endParaRPr lang="ru-RU" sz="1000" b="1" dirty="0">
               <a:solidFill>
@@ -4654,6 +4637,15 @@
                 <a:spcPct val="90000"/>
               </a:lnSpc>
             </a:pPr>
+            <a:r>
+              <a:rPr lang="ru-RU" sz="1000" dirty="0">
+                <a:solidFill>
+                  <a:srgbClr val="464646"/>
+                </a:solidFill>
+                <a:latin typeface="Segoe UI" panose="020B0502040204020203" pitchFamily="34" charset="0"/>
+              </a:rPr>
+              <a:t>рук. — </a:t>
+            </a:r>
             <a:r>
               <a:rPr lang="ru-RU" sz="1000" b="1" dirty="0">
                 <a:solidFill>

--- a/TAZA/_документы/Структура ЦАКФ и проектного офиса ТК – от Айгерим 20.10 – без окладов.pptx
+++ b/TAZA/_документы/Структура ЦАКФ и проектного офиса ТК – от Айгерим 20.10 – без окладов.pptx
@@ -6781,7 +6781,7 @@
                 <a:latin typeface="Segoe UI" panose="020B0502040204020203" pitchFamily="34" charset="0"/>
                 <a:sym typeface="+mn-ea"/>
               </a:rPr>
-              <a:t> – эколог</a:t>
+              <a:t> (эколог)</a:t>
             </a:r>
             <a:endParaRPr lang="ru-RU" sz="900" dirty="0">
               <a:solidFill>
@@ -6887,7 +6887,7 @@
                 </a:solidFill>
                 <a:latin typeface="Segoe UI" panose="020B0502040204020203" pitchFamily="34" charset="0"/>
               </a:rPr>
-              <a:t> – эколог</a:t>
+              <a:t> (эколог)</a:t>
             </a:r>
             <a:endParaRPr lang="ru-RU" sz="1000" dirty="0">
               <a:solidFill>
@@ -6972,7 +6972,7 @@
                 <a:latin typeface="Segoe UI" panose="020B0502040204020203" pitchFamily="34" charset="0"/>
                 <a:sym typeface="+mn-ea"/>
               </a:rPr>
-              <a:t> – эколог</a:t>
+              <a:t> (эколог)</a:t>
             </a:r>
             <a:endParaRPr lang="ru-RU" sz="1000" dirty="0">
               <a:solidFill>
